--- a/public/fun/pack/pptx/newspro/카드뉴스프리미엄_20_오늘의한마디_피스타치오크림.pptx
+++ b/public/fun/pack/pptx/newspro/카드뉴스프리미엄_20_오늘의한마디_피스타치오크림.pptx
@@ -113,12 +113,12 @@
   <p:extLst>
     <p:ext uri="{521415D9-36F7-43E2-AB2F-B90AF26B5E84}">
       <p14:sectionLst xmlns:p14="http://schemas.microsoft.com/office/powerpoint/2010/main">
-        <p14:section name="시작" id="{20F9ACF0-E82B-41C4-82C9-2CFFF33641D1}">
+        <p14:section name="시작" id="{E1F5B1EB-51C4-4CB6-9BA5-3F2149D42FC7}">
           <p14:sldIdLst>
             <p14:sldId id="256"/>
           </p14:sldIdLst>
         </p14:section>
-        <p14:section name="본문" id="{096FF689-E8A7-4D18-92FE-2710990BBEA4}">
+        <p14:section name="본문" id="{CDBD2D01-8E9A-47C3-BC09-B467F246E37D}">
           <p14:sldIdLst>
             <p14:sldId id="257"/>
             <p14:sldId id="258"/>
@@ -127,7 +127,7 @@
             <p14:sldId id="261"/>
           </p14:sldIdLst>
         </p14:section>
-        <p14:section name="마무리" id="{8B530C11-EA87-49C9-8087-2E6C4D87EF67}">
+        <p14:section name="마무리" id="{7B424F4C-E877-4C23-ABA9-B3A9209F1F83}">
           <p14:sldIdLst>
             <p14:sldId id="262"/>
           </p14:sldIdLst>
@@ -2515,7 +2515,7 @@
             </a:lvl1pPr>
           </a:lstStyle>
           <a:p>
-            <a:fld id="{0F214700-4F11-481F-A966-67E008BB82DD}" type="slidenum">
+            <a:fld id="{86E4A1A5-5227-416D-8A86-CB07BDE83A2C}" type="slidenum">
               <a:rPr lang="en-US"/>
               <a:t>‹#›</a:t>
             </a:fld>
@@ -4168,7 +4168,7 @@
             </a:lvl1pPr>
           </a:lstStyle>
           <a:p>
-            <a:fld id="{24CD87D3-4AEE-44C1-94EE-2F51ACEEE30F}" type="slidenum">
+            <a:fld id="{CC2A73BF-43E9-4DE9-9EE0-85CAC9D4D849}" type="slidenum">
               <a:rPr lang="en-US"/>
               <a:t>‹#›</a:t>
             </a:fld>
@@ -4846,7 +4846,7 @@
             </a:lvl1pPr>
           </a:lstStyle>
           <a:p>
-            <a:fld id="{B09CD1CB-78D6-46C7-86FC-E205FBA652DA}" type="slidenum">
+            <a:fld id="{ACF734ED-41A5-4753-9112-1F70C8356E2A}" type="slidenum">
               <a:rPr lang="en-US"/>
               <a:t>‹#›</a:t>
             </a:fld>
@@ -5794,7 +5794,7 @@
           <a:bodyPr/>
           <a:lstStyle/>
           <a:p>
-            <a:fld id="{47ABD8D6-4853-4E61-BC5E-13CB5EF0D8DC}" type="slidenum">
+            <a:fld id="{AE5F2519-1A99-4EA1-A2CC-E0A43EB3BC13}" type="slidenum">
               <a:rPr lang="en-US"/>
               <a:t>‹#›</a:t>
             </a:fld>
@@ -5960,7 +5960,7 @@
           <a:bodyPr/>
           <a:lstStyle/>
           <a:p>
-            <a:fld id="{EC98DE40-5096-4FD1-A0D6-7CDD54AA395F}" type="slidenum">
+            <a:fld id="{81E9A0B0-63C3-4B27-A03E-CDB0C84C2CCE}" type="slidenum">
               <a:rPr lang="en-US"/>
               <a:t>‹#›</a:t>
             </a:fld>
@@ -6126,7 +6126,7 @@
           <a:bodyPr/>
           <a:lstStyle/>
           <a:p>
-            <a:fld id="{590EE402-379F-4D5A-9DC6-3B972D639061}" type="slidenum">
+            <a:fld id="{AA9D2C8B-6E52-46C2-AF5A-7839F0C6E4EF}" type="slidenum">
               <a:rPr lang="en-US"/>
               <a:t>‹#›</a:t>
             </a:fld>
@@ -6292,7 +6292,7 @@
           <a:bodyPr/>
           <a:lstStyle/>
           <a:p>
-            <a:fld id="{D6363DB1-85B8-4CD2-9069-C53C0B0296FD}" type="slidenum">
+            <a:fld id="{F6892BEF-FDFA-438F-8F77-B88451000891}" type="slidenum">
               <a:rPr lang="en-US"/>
               <a:t>‹#›</a:t>
             </a:fld>
@@ -6458,7 +6458,7 @@
           <a:bodyPr/>
           <a:lstStyle/>
           <a:p>
-            <a:fld id="{BDB79994-0444-4575-BD31-F3613F8C3CB3}" type="slidenum">
+            <a:fld id="{DE66680C-15EF-4F85-B73D-8514568B3D52}" type="slidenum">
               <a:rPr lang="en-US"/>
               <a:t>‹#›</a:t>
             </a:fld>
